--- a/docs/free-rwe-resources/train-the-trainer/training/day-03-cohort-definitions/kit/Participant-Workbook.pptx
+++ b/docs/free-rwe-resources/train-the-trainer/training/day-03-cohort-definitions/kit/Participant-Workbook.pptx
@@ -10,6 +10,7 @@
     <p:sldId id="258" r:id="rId9"/>
     <p:sldId id="259" r:id="rId10"/>
     <p:sldId id="260" r:id="rId11"/>
+    <p:sldId id="261" r:id="rId12"/>
   </p:sldIdLst>
   <p:sldSz cx="12188952" cy="6858000" type="screen4x3"/>
   <p:notesSz cx="6858000" cy="9144000"/>
@@ -3107,7 +3108,7 @@
             <a:avLst/>
           </a:prstGeom>
           <a:solidFill>
-            <a:srgbClr val="4B2682"/>
+            <a:srgbClr val="20425A"/>
           </a:solidFill>
           <a:ln>
             <a:noFill/>
@@ -3150,7 +3151,7 @@
             <a:avLst/>
           </a:prstGeom>
           <a:solidFill>
-            <a:srgbClr val="7B4FA8"/>
+            <a:srgbClr val="904199"/>
           </a:solidFill>
           <a:ln>
             <a:noFill/>
@@ -3193,7 +3194,7 @@
             <a:avLst/>
           </a:prstGeom>
           <a:solidFill>
-            <a:srgbClr val="7B4FA8"/>
+            <a:srgbClr val="904199"/>
           </a:solidFill>
           <a:ln>
             <a:noFill/>
@@ -3236,7 +3237,7 @@
             <a:avLst/>
           </a:prstGeom>
           <a:solidFill>
-            <a:srgbClr val="7B4FA8"/>
+            <a:srgbClr val="904199"/>
           </a:solidFill>
           <a:ln>
             <a:noFill/>
@@ -3292,6 +3293,7 @@
                 <a:solidFill>
                   <a:srgbClr val="FFFFFF"/>
                 </a:solidFill>
+                <a:latin typeface="Gotham Narrow"/>
               </a:rPr>
               <a:t>DAY 3</a:t>
             </a:r>
@@ -3326,6 +3328,7 @@
                 <a:solidFill>
                   <a:srgbClr val="FFFFFF"/>
                 </a:solidFill>
+                <a:latin typeface="Gotham Narrow"/>
               </a:rPr>
               <a:t>Cohort Definition
 and Characterization</a:t>
@@ -3359,8 +3362,9 @@
             <a:r>
               <a:rPr sz="2200" b="0" i="0">
                 <a:solidFill>
-                  <a:srgbClr val="C8B4E6"/>
-                </a:solidFill>
+                  <a:srgbClr val="D9C4E6"/>
+                </a:solidFill>
+                <a:latin typeface="Arial"/>
               </a:rPr>
               <a:t>Participant Workbook</a:t>
             </a:r>
@@ -3393,8 +3397,9 @@
             <a:r>
               <a:rPr sz="1300" b="0" i="0">
                 <a:solidFill>
-                  <a:srgbClr val="AA96CD"/>
-                </a:solidFill>
+                  <a:srgbClr val="AEC4D2"/>
+                </a:solidFill>
+                <a:latin typeface="Arial"/>
               </a:rPr>
               <a:t>ALS TDI · OHDSI/OMOP Train-the-Trainer</a:t>
             </a:r>
@@ -3434,7 +3439,7 @@
             <a:avLst/>
           </a:prstGeom>
           <a:solidFill>
-            <a:srgbClr val="4B2682"/>
+            <a:srgbClr val="20425A"/>
           </a:solidFill>
           <a:ln>
             <a:noFill/>
@@ -3470,14 +3475,14 @@
         </p:nvSpPr>
         <p:spPr>
           <a:xfrm>
-            <a:off x="0" y="923544"/>
-            <a:ext cx="12188952" cy="36576"/>
+            <a:off x="0" y="905256"/>
+            <a:ext cx="12188952" cy="54864"/>
           </a:xfrm>
           <a:prstGeom prst="rect">
             <a:avLst/>
           </a:prstGeom>
           <a:solidFill>
-            <a:srgbClr val="7B4FA8"/>
+            <a:srgbClr val="904199"/>
           </a:solidFill>
           <a:ln>
             <a:noFill/>
@@ -3533,6 +3538,7 @@
                 <a:solidFill>
                   <a:srgbClr val="FFFFFF"/>
                 </a:solidFill>
+                <a:latin typeface="Gotham Narrow"/>
               </a:rPr>
               <a:t>Learning Objectives</a:t>
             </a:r>
@@ -3567,6 +3573,7 @@
                 <a:solidFill>
                   <a:srgbClr val="5A5A5A"/>
                 </a:solidFill>
+                <a:latin typeface="Arial"/>
               </a:rPr>
               <a:t>By the end of this session, you will be able to:</a:t>
             </a:r>
@@ -3588,7 +3595,7 @@
             <a:avLst/>
           </a:prstGeom>
           <a:solidFill>
-            <a:srgbClr val="7B4FA8"/>
+            <a:srgbClr val="904199"/>
           </a:solidFill>
           <a:ln>
             <a:noFill/>
@@ -3644,6 +3651,7 @@
                 <a:solidFill>
                   <a:srgbClr val="FFFFFF"/>
                 </a:solidFill>
+                <a:latin typeface="Arial"/>
               </a:rPr>
               <a:t>1</a:t>
             </a:r>
@@ -3678,6 +3686,7 @@
                 <a:solidFill>
                   <a:srgbClr val="191919"/>
                 </a:solidFill>
+                <a:latin typeface="Arial"/>
               </a:rPr>
               <a:t>Define an OHDSI cohort and explain how it differs from a simple code list</a:t>
             </a:r>
@@ -3699,7 +3708,7 @@
             <a:avLst/>
           </a:prstGeom>
           <a:solidFill>
-            <a:srgbClr val="7B4FA8"/>
+            <a:srgbClr val="904199"/>
           </a:solidFill>
           <a:ln>
             <a:noFill/>
@@ -3755,6 +3764,7 @@
                 <a:solidFill>
                   <a:srgbClr val="FFFFFF"/>
                 </a:solidFill>
+                <a:latin typeface="Arial"/>
               </a:rPr>
               <a:t>2</a:t>
             </a:r>
@@ -3789,6 +3799,7 @@
                 <a:solidFill>
                   <a:srgbClr val="191919"/>
                 </a:solidFill>
+                <a:latin typeface="Arial"/>
               </a:rPr>
               <a:t>Identify and apply the four parts: entry event, concept sets, inclusion criteria, exit</a:t>
             </a:r>
@@ -3810,7 +3821,7 @@
             <a:avLst/>
           </a:prstGeom>
           <a:solidFill>
-            <a:srgbClr val="7B4FA8"/>
+            <a:srgbClr val="904199"/>
           </a:solidFill>
           <a:ln>
             <a:noFill/>
@@ -3866,6 +3877,7 @@
                 <a:solidFill>
                   <a:srgbClr val="FFFFFF"/>
                 </a:solidFill>
+                <a:latin typeface="Arial"/>
               </a:rPr>
               <a:t>3</a:t>
             </a:r>
@@ -3900,6 +3912,7 @@
                 <a:solidFill>
                   <a:srgbClr val="191919"/>
                 </a:solidFill>
+                <a:latin typeface="Arial"/>
               </a:rPr>
               <a:t>Apply temporal logic correctly in inclusion and exclusion rules</a:t>
             </a:r>
@@ -3921,7 +3934,7 @@
             <a:avLst/>
           </a:prstGeom>
           <a:solidFill>
-            <a:srgbClr val="7B4FA8"/>
+            <a:srgbClr val="904199"/>
           </a:solidFill>
           <a:ln>
             <a:noFill/>
@@ -3977,6 +3990,7 @@
                 <a:solidFill>
                   <a:srgbClr val="FFFFFF"/>
                 </a:solidFill>
+                <a:latin typeface="Arial"/>
               </a:rPr>
               <a:t>4</a:t>
             </a:r>
@@ -4011,6 +4025,7 @@
                 <a:solidFill>
                   <a:srgbClr val="191919"/>
                 </a:solidFill>
+                <a:latin typeface="Arial"/>
               </a:rPr>
               <a:t>Build and generate a cohort in ATLAS, read the attrition report, and characterize</a:t>
             </a:r>
@@ -4050,7 +4065,7 @@
             <a:avLst/>
           </a:prstGeom>
           <a:solidFill>
-            <a:srgbClr val="4B2682"/>
+            <a:srgbClr val="20425A"/>
           </a:solidFill>
           <a:ln>
             <a:noFill/>
@@ -4086,14 +4101,14 @@
         </p:nvSpPr>
         <p:spPr>
           <a:xfrm>
-            <a:off x="0" y="923544"/>
-            <a:ext cx="12188952" cy="36576"/>
+            <a:off x="0" y="905256"/>
+            <a:ext cx="12188952" cy="54864"/>
           </a:xfrm>
           <a:prstGeom prst="rect">
             <a:avLst/>
           </a:prstGeom>
           <a:solidFill>
-            <a:srgbClr val="7B4FA8"/>
+            <a:srgbClr val="904199"/>
           </a:solidFill>
           <a:ln>
             <a:noFill/>
@@ -4149,6 +4164,7 @@
                 <a:solidFill>
                   <a:srgbClr val="FFFFFF"/>
                 </a:solidFill>
+                <a:latin typeface="Gotham Narrow"/>
               </a:rPr>
               <a:t>The Four Parts — Fill In</a:t>
             </a:r>
@@ -4189,6 +4205,7 @@
                           <a:solidFill>
                             <a:srgbClr val="FFFFFF"/>
                           </a:solidFill>
+                          <a:latin typeface="Gotham Narrow"/>
                         </a:rPr>
                         <a:t>Part</a:t>
                       </a:r>
@@ -4196,7 +4213,7 @@
                   </a:txBody>
                   <a:tcPr>
                     <a:solidFill>
-                      <a:srgbClr val="4B2682"/>
+                      <a:srgbClr val="20425A"/>
                     </a:solidFill>
                   </a:tcPr>
                 </a:tc>
@@ -4210,6 +4227,7 @@
                           <a:solidFill>
                             <a:srgbClr val="FFFFFF"/>
                           </a:solidFill>
+                          <a:latin typeface="Gotham Narrow"/>
                         </a:rPr>
                         <a:t>What It Defines</a:t>
                       </a:r>
@@ -4217,7 +4235,7 @@
                   </a:txBody>
                   <a:tcPr>
                     <a:solidFill>
-                      <a:srgbClr val="4B2682"/>
+                      <a:srgbClr val="20425A"/>
                     </a:solidFill>
                   </a:tcPr>
                 </a:tc>
@@ -4231,6 +4249,7 @@
                           <a:solidFill>
                             <a:srgbClr val="FFFFFF"/>
                           </a:solidFill>
+                          <a:latin typeface="Gotham Narrow"/>
                         </a:rPr>
                         <a:t>Your Example (fill in)</a:t>
                       </a:r>
@@ -4238,7 +4257,7 @@
                   </a:txBody>
                   <a:tcPr>
                     <a:solidFill>
-                      <a:srgbClr val="4B2682"/>
+                      <a:srgbClr val="20425A"/>
                     </a:solidFill>
                   </a:tcPr>
                 </a:tc>
@@ -4254,6 +4273,7 @@
                           <a:solidFill>
                             <a:srgbClr val="191919"/>
                           </a:solidFill>
+                          <a:latin typeface="Arial"/>
                         </a:rPr>
                         <a:t>Entry Event (Initial Event)</a:t>
                       </a:r>
@@ -4275,6 +4295,7 @@
                           <a:solidFill>
                             <a:srgbClr val="191919"/>
                           </a:solidFill>
+                          <a:latin typeface="Arial"/>
                         </a:rPr>
                         <a:t>The qualifying event that brings a person into the cohort</a:t>
                       </a:r>
@@ -4296,6 +4317,7 @@
                           <a:solidFill>
                             <a:srgbClr val="191919"/>
                           </a:solidFill>
+                          <a:latin typeface="Arial"/>
                         </a:rPr>
                         <a:t/>
                       </a:r>
@@ -4319,6 +4341,7 @@
                           <a:solidFill>
                             <a:srgbClr val="191919"/>
                           </a:solidFill>
+                          <a:latin typeface="Arial"/>
                         </a:rPr>
                         <a:t>Concept Sets</a:t>
                       </a:r>
@@ -4340,6 +4363,7 @@
                           <a:solidFill>
                             <a:srgbClr val="191919"/>
                           </a:solidFill>
+                          <a:latin typeface="Arial"/>
                         </a:rPr>
                         <a:t>The reusable clinical concepts defining the entry event and rules</a:t>
                       </a:r>
@@ -4361,6 +4385,7 @@
                           <a:solidFill>
                             <a:srgbClr val="191919"/>
                           </a:solidFill>
+                          <a:latin typeface="Arial"/>
                         </a:rPr>
                         <a:t/>
                       </a:r>
@@ -4384,6 +4409,7 @@
                           <a:solidFill>
                             <a:srgbClr val="191919"/>
                           </a:solidFill>
+                          <a:latin typeface="Arial"/>
                         </a:rPr>
                         <a:t>Inclusion Criteria</a:t>
                       </a:r>
@@ -4405,6 +4431,7 @@
                           <a:solidFill>
                             <a:srgbClr val="191919"/>
                           </a:solidFill>
+                          <a:latin typeface="Arial"/>
                         </a:rPr>
                         <a:t>Additional conditions a person must meet after entry event</a:t>
                       </a:r>
@@ -4426,6 +4453,7 @@
                           <a:solidFill>
                             <a:srgbClr val="191919"/>
                           </a:solidFill>
+                          <a:latin typeface="Arial"/>
                         </a:rPr>
                         <a:t/>
                       </a:r>
@@ -4449,6 +4477,7 @@
                           <a:solidFill>
                             <a:srgbClr val="191919"/>
                           </a:solidFill>
+                          <a:latin typeface="Arial"/>
                         </a:rPr>
                         <a:t>Cohort Exit</a:t>
                       </a:r>
@@ -4470,6 +4499,7 @@
                           <a:solidFill>
                             <a:srgbClr val="191919"/>
                           </a:solidFill>
+                          <a:latin typeface="Arial"/>
                         </a:rPr>
                         <a:t>When and how a person leaves the cohort</a:t>
                       </a:r>
@@ -4491,6 +4521,7 @@
                           <a:solidFill>
                             <a:srgbClr val="191919"/>
                           </a:solidFill>
+                          <a:latin typeface="Arial"/>
                         </a:rPr>
                         <a:t/>
                       </a:r>
@@ -4540,7 +4571,7 @@
             <a:avLst/>
           </a:prstGeom>
           <a:solidFill>
-            <a:srgbClr val="4B2682"/>
+            <a:srgbClr val="20425A"/>
           </a:solidFill>
           <a:ln>
             <a:noFill/>
@@ -4576,14 +4607,14 @@
         </p:nvSpPr>
         <p:spPr>
           <a:xfrm>
-            <a:off x="0" y="923544"/>
-            <a:ext cx="12188952" cy="36576"/>
+            <a:off x="0" y="905256"/>
+            <a:ext cx="12188952" cy="54864"/>
           </a:xfrm>
           <a:prstGeom prst="rect">
             <a:avLst/>
           </a:prstGeom>
           <a:solidFill>
-            <a:srgbClr val="7B4FA8"/>
+            <a:srgbClr val="904199"/>
           </a:solidFill>
           <a:ln>
             <a:noFill/>
@@ -4639,6 +4670,7 @@
                 <a:solidFill>
                   <a:srgbClr val="FFFFFF"/>
                 </a:solidFill>
+                <a:latin typeface="Gotham Narrow"/>
               </a:rPr>
               <a:t>My Metformin Cohort — Lab Worksheet</a:t>
             </a:r>
@@ -4677,6 +4709,7 @@
                 <a:solidFill>
                   <a:srgbClr val="191919"/>
                 </a:solidFill>
+                <a:latin typeface="Arial"/>
               </a:rPr>
               <a:t>Entry event concept: ____________________________________________</a:t>
             </a:r>
@@ -4692,6 +4725,7 @@
                 <a:solidFill>
                   <a:srgbClr val="191919"/>
                 </a:solidFill>
+                <a:latin typeface="Arial"/>
               </a:rPr>
               <a:t>Include Descendants ON?  ☐ Yes  ☐ No</a:t>
             </a:r>
@@ -4707,6 +4741,7 @@
                 <a:solidFill>
                   <a:srgbClr val="191919"/>
                 </a:solidFill>
+                <a:latin typeface="Arial"/>
               </a:rPr>
               <a:t>Restrict to first event?  ☐ Yes  ☐ No</a:t>
             </a:r>
@@ -4722,6 +4757,7 @@
                 <a:solidFill>
                   <a:srgbClr val="191919"/>
                 </a:solidFill>
+                <a:latin typeface="Arial"/>
               </a:rPr>
               <a:t>Inclusion Rule 1 (prior observation):  ___________________________</a:t>
             </a:r>
@@ -4737,6 +4773,7 @@
                 <a:solidFill>
                   <a:srgbClr val="191919"/>
                 </a:solidFill>
+                <a:latin typeface="Arial"/>
               </a:rPr>
               <a:t>   Window: _________ days  BEFORE  AFTER  BOTH (circle one)</a:t>
             </a:r>
@@ -4752,6 +4789,7 @@
                 <a:solidFill>
                   <a:srgbClr val="191919"/>
                 </a:solidFill>
+                <a:latin typeface="Arial"/>
               </a:rPr>
               <a:t>Inclusion Rule 2 (no prior sulfonylurea):  _______________________</a:t>
             </a:r>
@@ -4767,6 +4805,7 @@
                 <a:solidFill>
                   <a:srgbClr val="191919"/>
                 </a:solidFill>
+                <a:latin typeface="Arial"/>
               </a:rPr>
               <a:t>   Window: _________ days  BEFORE  AFTER  BOTH (circle one)</a:t>
             </a:r>
@@ -4782,6 +4821,7 @@
                 <a:solidFill>
                   <a:srgbClr val="191919"/>
                 </a:solidFill>
+                <a:latin typeface="Arial"/>
               </a:rPr>
               <a:t>Cohort exit strategy:  _________________________________________</a:t>
             </a:r>
@@ -4797,6 +4837,7 @@
                 <a:solidFill>
                   <a:srgbClr val="191919"/>
                 </a:solidFill>
+                <a:latin typeface="Arial"/>
               </a:rPr>
               <a:t>Atlas cohort count (final):  ____________________________________</a:t>
             </a:r>
@@ -4812,6 +4853,7 @@
                 <a:solidFill>
                   <a:srgbClr val="191919"/>
                 </a:solidFill>
+                <a:latin typeface="Arial"/>
               </a:rPr>
               <a:t>Biggest attrition step (rule name + % removed):  _________________</a:t>
             </a:r>
@@ -4851,7 +4893,7 @@
             <a:avLst/>
           </a:prstGeom>
           <a:solidFill>
-            <a:srgbClr val="4B2682"/>
+            <a:srgbClr val="20425A"/>
           </a:solidFill>
           <a:ln>
             <a:noFill/>
@@ -4887,14 +4929,14 @@
         </p:nvSpPr>
         <p:spPr>
           <a:xfrm>
-            <a:off x="0" y="923544"/>
-            <a:ext cx="12188952" cy="36576"/>
+            <a:off x="0" y="905256"/>
+            <a:ext cx="12188952" cy="54864"/>
           </a:xfrm>
           <a:prstGeom prst="rect">
             <a:avLst/>
           </a:prstGeom>
           <a:solidFill>
-            <a:srgbClr val="7B4FA8"/>
+            <a:srgbClr val="904199"/>
           </a:solidFill>
           <a:ln>
             <a:noFill/>
@@ -4950,6 +4992,7 @@
                 <a:solidFill>
                   <a:srgbClr val="FFFFFF"/>
                 </a:solidFill>
+                <a:latin typeface="Gotham Narrow"/>
               </a:rPr>
               <a:t>Characterization Findings — Record Here</a:t>
             </a:r>
@@ -4988,6 +5031,7 @@
                 <a:solidFill>
                   <a:srgbClr val="191919"/>
                 </a:solidFill>
+                <a:latin typeface="Arial"/>
               </a:rPr>
               <a:t>Mean age of cohort members:  ____________________________________</a:t>
             </a:r>
@@ -5003,6 +5047,7 @@
                 <a:solidFill>
                   <a:srgbClr val="191919"/>
                 </a:solidFill>
+                <a:latin typeface="Arial"/>
               </a:rPr>
               <a:t>Sex distribution (% male / % female):  __________________________</a:t>
             </a:r>
@@ -5018,6 +5063,7 @@
                 <a:solidFill>
                   <a:srgbClr val="191919"/>
                 </a:solidFill>
+                <a:latin typeface="Arial"/>
               </a:rPr>
               <a:t>Top 3 prior conditions:</a:t>
             </a:r>
@@ -5033,6 +5079,7 @@
                 <a:solidFill>
                   <a:srgbClr val="191919"/>
                 </a:solidFill>
+                <a:latin typeface="Arial"/>
               </a:rPr>
               <a:t>1.  ______________________________________________</a:t>
             </a:r>
@@ -5048,6 +5095,7 @@
                 <a:solidFill>
                   <a:srgbClr val="191919"/>
                 </a:solidFill>
+                <a:latin typeface="Arial"/>
               </a:rPr>
               <a:t>2.  ______________________________________________</a:t>
             </a:r>
@@ -5063,6 +5111,7 @@
                 <a:solidFill>
                   <a:srgbClr val="191919"/>
                 </a:solidFill>
+                <a:latin typeface="Arial"/>
               </a:rPr>
               <a:t>3.  ______________________________________________</a:t>
             </a:r>
@@ -5078,6 +5127,7 @@
                 <a:solidFill>
                   <a:srgbClr val="191919"/>
                 </a:solidFill>
+                <a:latin typeface="Arial"/>
               </a:rPr>
               <a:t>Top 3 prior drugs:</a:t>
             </a:r>
@@ -5093,6 +5143,7 @@
                 <a:solidFill>
                   <a:srgbClr val="191919"/>
                 </a:solidFill>
+                <a:latin typeface="Arial"/>
               </a:rPr>
               <a:t>1.  ______________________________________________</a:t>
             </a:r>
@@ -5108,6 +5159,7 @@
                 <a:solidFill>
                   <a:srgbClr val="191919"/>
                 </a:solidFill>
+                <a:latin typeface="Arial"/>
               </a:rPr>
               <a:t>2.  ______________________________________________</a:t>
             </a:r>
@@ -5123,6 +5175,7 @@
                 <a:solidFill>
                   <a:srgbClr val="191919"/>
                 </a:solidFill>
+                <a:latin typeface="Arial"/>
               </a:rPr>
               <a:t>3.  ______________________________________________</a:t>
             </a:r>
@@ -5138,8 +5191,296 @@
                 <a:solidFill>
                   <a:srgbClr val="191919"/>
                 </a:solidFill>
+                <a:latin typeface="Arial"/>
               </a:rPr>
               <a:t>Does this population look like what you expected?  ☐ Yes  ☐ No — Why?  __________</a:t>
+            </a:r>
+          </a:p>
+        </p:txBody>
+      </p:sp>
+    </p:spTree>
+  </p:cSld>
+  <p:clrMapOvr>
+    <a:masterClrMapping/>
+  </p:clrMapOvr>
+</p:sld>
+</file>
+
+<file path=ppt/slides/slide6.xml><?xml version="1.0" encoding="utf-8"?>
+<p:sld xmlns:a="http://schemas.openxmlformats.org/drawingml/2006/main" xmlns:p="http://schemas.openxmlformats.org/presentationml/2006/main" xmlns:r="http://schemas.openxmlformats.org/officeDocument/2006/relationships">
+  <p:cSld>
+    <p:spTree>
+      <p:nvGrpSpPr>
+        <p:cNvPr id="1" name=""/>
+        <p:cNvGrpSpPr/>
+        <p:nvPr/>
+      </p:nvGrpSpPr>
+      <p:grpSpPr/>
+      <p:sp>
+        <p:nvSpPr>
+          <p:cNvPr id="2" name="Rectangle 1"/>
+          <p:cNvSpPr/>
+          <p:nvPr/>
+        </p:nvSpPr>
+        <p:spPr>
+          <a:xfrm>
+            <a:off x="0" y="0"/>
+            <a:ext cx="12188952" cy="6858000"/>
+          </a:xfrm>
+          <a:prstGeom prst="rect">
+            <a:avLst/>
+          </a:prstGeom>
+          <a:solidFill>
+            <a:srgbClr val="20425A"/>
+          </a:solidFill>
+          <a:ln>
+            <a:noFill/>
+          </a:ln>
+        </p:spPr>
+        <p:style>
+          <a:lnRef idx="1">
+            <a:schemeClr val="accent1"/>
+          </a:lnRef>
+          <a:fillRef idx="3">
+            <a:schemeClr val="accent1"/>
+          </a:fillRef>
+          <a:effectRef idx="2">
+            <a:schemeClr val="accent1"/>
+          </a:effectRef>
+          <a:fontRef idx="minor">
+            <a:schemeClr val="lt1"/>
+          </a:fontRef>
+        </p:style>
+        <p:txBody>
+          <a:bodyPr rtlCol="0" anchor="ctr"/>
+          <a:lstStyle/>
+          <a:p>
+            <a:pPr algn="ctr"/>
+          </a:p>
+        </p:txBody>
+      </p:sp>
+      <p:sp>
+        <p:nvSpPr>
+          <p:cNvPr id="3" name="Rectangle 2"/>
+          <p:cNvSpPr/>
+          <p:nvPr/>
+        </p:nvSpPr>
+        <p:spPr>
+          <a:xfrm>
+            <a:off x="0" y="0"/>
+            <a:ext cx="12188952" cy="64008"/>
+          </a:xfrm>
+          <a:prstGeom prst="rect">
+            <a:avLst/>
+          </a:prstGeom>
+          <a:solidFill>
+            <a:srgbClr val="904199"/>
+          </a:solidFill>
+          <a:ln>
+            <a:noFill/>
+          </a:ln>
+        </p:spPr>
+        <p:style>
+          <a:lnRef idx="1">
+            <a:schemeClr val="accent1"/>
+          </a:lnRef>
+          <a:fillRef idx="3">
+            <a:schemeClr val="accent1"/>
+          </a:fillRef>
+          <a:effectRef idx="2">
+            <a:schemeClr val="accent1"/>
+          </a:effectRef>
+          <a:fontRef idx="minor">
+            <a:schemeClr val="lt1"/>
+          </a:fontRef>
+        </p:style>
+        <p:txBody>
+          <a:bodyPr rtlCol="0" anchor="ctr"/>
+          <a:lstStyle/>
+          <a:p>
+            <a:pPr algn="ctr"/>
+          </a:p>
+        </p:txBody>
+      </p:sp>
+      <p:sp>
+        <p:nvSpPr>
+          <p:cNvPr id="4" name="Rectangle 3"/>
+          <p:cNvSpPr/>
+          <p:nvPr/>
+        </p:nvSpPr>
+        <p:spPr>
+          <a:xfrm>
+            <a:off x="0" y="6793992"/>
+            <a:ext cx="12188952" cy="64008"/>
+          </a:xfrm>
+          <a:prstGeom prst="rect">
+            <a:avLst/>
+          </a:prstGeom>
+          <a:solidFill>
+            <a:srgbClr val="904199"/>
+          </a:solidFill>
+          <a:ln>
+            <a:noFill/>
+          </a:ln>
+        </p:spPr>
+        <p:style>
+          <a:lnRef idx="1">
+            <a:schemeClr val="accent1"/>
+          </a:lnRef>
+          <a:fillRef idx="3">
+            <a:schemeClr val="accent1"/>
+          </a:fillRef>
+          <a:effectRef idx="2">
+            <a:schemeClr val="accent1"/>
+          </a:effectRef>
+          <a:fontRef idx="minor">
+            <a:schemeClr val="lt1"/>
+          </a:fontRef>
+        </p:style>
+        <p:txBody>
+          <a:bodyPr rtlCol="0" anchor="ctr"/>
+          <a:lstStyle/>
+          <a:p>
+            <a:pPr algn="ctr"/>
+          </a:p>
+        </p:txBody>
+      </p:sp>
+      <p:sp>
+        <p:nvSpPr>
+          <p:cNvPr id="5" name="TextBox 4"/>
+          <p:cNvSpPr txBox="1"/>
+          <p:nvPr/>
+        </p:nvSpPr>
+        <p:spPr>
+          <a:xfrm>
+            <a:off x="475488" y="1828800"/>
+            <a:ext cx="11237976" cy="1188720"/>
+          </a:xfrm>
+          <a:prstGeom prst="rect">
+            <a:avLst/>
+          </a:prstGeom>
+          <a:noFill/>
+        </p:spPr>
+        <p:txBody>
+          <a:bodyPr wrap="square">
+            <a:spAutoFit/>
+          </a:bodyPr>
+          <a:lstStyle/>
+          <a:p>
+            <a:pPr algn="l"/>
+            <a:r>
+              <a:rPr sz="4400" b="1" i="0">
+                <a:solidFill>
+                  <a:srgbClr val="FFFFFF"/>
+                </a:solidFill>
+                <a:latin typeface="Gotham Narrow"/>
+              </a:rPr>
+              <a:t>Thank You.  Questions?</a:t>
+            </a:r>
+          </a:p>
+        </p:txBody>
+      </p:sp>
+      <p:sp>
+        <p:nvSpPr>
+          <p:cNvPr id="6" name="TextBox 5"/>
+          <p:cNvSpPr txBox="1"/>
+          <p:nvPr/>
+        </p:nvSpPr>
+        <p:spPr>
+          <a:xfrm>
+            <a:off x="475488" y="3383280"/>
+            <a:ext cx="11237976" cy="640080"/>
+          </a:xfrm>
+          <a:prstGeom prst="rect">
+            <a:avLst/>
+          </a:prstGeom>
+          <a:noFill/>
+        </p:spPr>
+        <p:txBody>
+          <a:bodyPr wrap="square">
+            <a:spAutoFit/>
+          </a:bodyPr>
+          <a:lstStyle/>
+          <a:p>
+            <a:pPr algn="l"/>
+            <a:r>
+              <a:rPr sz="2400" b="0" i="0">
+                <a:solidFill>
+                  <a:srgbClr val="FFFFFF"/>
+                </a:solidFill>
+                <a:latin typeface="Arial"/>
+              </a:rPr>
+              <a:t>Danielle Boyce</a:t>
+            </a:r>
+          </a:p>
+        </p:txBody>
+      </p:sp>
+      <p:sp>
+        <p:nvSpPr>
+          <p:cNvPr id="7" name="TextBox 6"/>
+          <p:cNvSpPr txBox="1"/>
+          <p:nvPr/>
+        </p:nvSpPr>
+        <p:spPr>
+          <a:xfrm>
+            <a:off x="475488" y="3977639"/>
+            <a:ext cx="11237976" cy="640080"/>
+          </a:xfrm>
+          <a:prstGeom prst="rect">
+            <a:avLst/>
+          </a:prstGeom>
+          <a:noFill/>
+        </p:spPr>
+        <p:txBody>
+          <a:bodyPr wrap="square">
+            <a:spAutoFit/>
+          </a:bodyPr>
+          <a:lstStyle/>
+          <a:p>
+            <a:pPr algn="l"/>
+            <a:r>
+              <a:rPr sz="2200" b="0" i="0">
+                <a:solidFill>
+                  <a:srgbClr val="D9C4E6"/>
+                </a:solidFill>
+                <a:latin typeface="Arial"/>
+              </a:rPr>
+              <a:t>dboyce@als.net</a:t>
+            </a:r>
+          </a:p>
+        </p:txBody>
+      </p:sp>
+      <p:sp>
+        <p:nvSpPr>
+          <p:cNvPr id="8" name="TextBox 7"/>
+          <p:cNvSpPr txBox="1"/>
+          <p:nvPr/>
+        </p:nvSpPr>
+        <p:spPr>
+          <a:xfrm>
+            <a:off x="475488" y="6309360"/>
+            <a:ext cx="8229600" cy="365760"/>
+          </a:xfrm>
+          <a:prstGeom prst="rect">
+            <a:avLst/>
+          </a:prstGeom>
+          <a:noFill/>
+        </p:spPr>
+        <p:txBody>
+          <a:bodyPr wrap="square">
+            <a:spAutoFit/>
+          </a:bodyPr>
+          <a:lstStyle/>
+          <a:p>
+            <a:pPr algn="l"/>
+            <a:r>
+              <a:rPr sz="1300" b="0" i="0">
+                <a:solidFill>
+                  <a:srgbClr val="AEC4D2"/>
+                </a:solidFill>
+                <a:latin typeface="Arial"/>
+              </a:rPr>
+              <a:t>ALS TDI · OHDSI/OMOP Train-the-Trainer</a:t>
             </a:r>
           </a:p>
         </p:txBody>
